--- a/Collaterals/IntelMakersESP32course - class 2.pptx
+++ b/Collaterals/IntelMakersESP32course - class 2.pptx
@@ -274,7 +274,7 @@
                 <a:latin typeface="Intel Clear"/>
               </a:rPr>
               <a:pPr/>
-              <a:t>12/5/2022</a:t>
+              <a:t>8/7/2024</a:t>
             </a:fld>
             <a:endParaRPr lang="en-US" dirty="0">
               <a:latin typeface="Intel Clear"/>
@@ -454,7 +454,7 @@
             <a:fld id="{ED7FC5FE-6F0D-D34A-8EE6-C95B4F5F4DC8}" type="datetimeFigureOut">
               <a:rPr lang="en-US" smtClean="0"/>
               <a:pPr/>
-              <a:t>12/5/2022</a:t>
+              <a:t>8/7/2024</a:t>
             </a:fld>
             <a:endParaRPr lang="en-US" dirty="0"/>
           </a:p>
@@ -12142,7 +12142,12 @@
             <p:ph type="ctrTitle"/>
           </p:nvPr>
         </p:nvSpPr>
-        <p:spPr/>
+        <p:spPr>
+          <a:xfrm>
+            <a:off x="1878851" y="3836584"/>
+            <a:ext cx="8212886" cy="1102519"/>
+          </a:xfrm>
+        </p:spPr>
         <p:txBody>
           <a:bodyPr/>
           <a:lstStyle/>
@@ -13647,7 +13652,7 @@
             </a:pPr>
             <a:r>
               <a:rPr lang="en-US" sz="1600" dirty="0"/>
-              <a:t>We need to place the driver in the library Arduino folder</a:t>
+              <a:t>We need to place the driver in the Arduino library folder</a:t>
             </a:r>
           </a:p>
           <a:p>
@@ -21595,7 +21600,7 @@
         </p:nvSpPr>
         <p:spPr>
           <a:xfrm>
-            <a:off x="455613" y="308848"/>
+            <a:off x="60977" y="110172"/>
             <a:ext cx="8229600" cy="365709"/>
           </a:xfrm>
         </p:spPr>
@@ -21604,7 +21609,7 @@
           <a:lstStyle/>
           <a:p>
             <a:r>
-              <a:rPr lang="en-US" dirty="0"/>
+              <a:rPr lang="en-US" sz="2400" dirty="0"/>
               <a:t>ESP32 Flash memory Partitions</a:t>
             </a:r>
           </a:p>
@@ -25357,7 +25362,7 @@
         </p:nvSpPr>
         <p:spPr>
           <a:xfrm>
-            <a:off x="455613" y="308848"/>
+            <a:off x="36914" y="135593"/>
             <a:ext cx="8229600" cy="371705"/>
           </a:xfrm>
         </p:spPr>
@@ -25366,10 +25371,9 @@
           <a:lstStyle/>
           <a:p>
             <a:r>
-              <a:rPr lang="en-US" sz="3600" dirty="0"/>
+              <a:rPr lang="en-US" sz="2800" dirty="0"/>
               <a:t>I/O matrix and device mapping</a:t>
             </a:r>
-            <a:endParaRPr lang="en-US" dirty="0"/>
           </a:p>
         </p:txBody>
       </p:sp>
